--- a/ZenabuPhD/COMMUNITY PROTECTION/PRESENTATIONS/CP_Presentation3_CHAI.pptx
+++ b/ZenabuPhD/COMMUNITY PROTECTION/PRESENTATIONS/CP_Presentation3_CHAI.pptx
@@ -255,7 +255,7 @@
           <a:p>
             <a:fld id="{E7F142B0-B91C-4CEB-A596-BAFBF7C16CA8}" type="datetimeFigureOut">
               <a:rPr lang="de-CH" smtClean="0"/>
-              <a:t>14.05.2026</a:t>
+              <a:t>20.05.2026</a:t>
             </a:fld>
             <a:endParaRPr lang="de-CH"/>
           </a:p>
@@ -432,7 +432,7 @@
           <a:p>
             <a:fld id="{1AD84D78-5243-4D95-A46D-1A2BEC34DE8C}" type="datetimeFigureOut">
               <a:rPr lang="de-CH" smtClean="0"/>
-              <a:t>14.05.2026</a:t>
+              <a:t>20.05.2026</a:t>
             </a:fld>
             <a:endParaRPr lang="de-CH"/>
           </a:p>
@@ -966,8 +966,8 @@
           </a:p>
         </p:txBody>
       </p:sp>
-      <mc:AlternateContent xmlns:mc="http://schemas.openxmlformats.org/markup-compatibility/2006">
-        <mc:Choice xmlns:a14="http://schemas.microsoft.com/office/drawing/2010/main" Requires="a14">
+      <mc:AlternateContent xmlns:mc="http://schemas.openxmlformats.org/markup-compatibility/2006" xmlns:a14="http://schemas.microsoft.com/office/drawing/2010/main">
+        <mc:Choice Requires="a14">
           <p:sp>
             <p:nvSpPr>
               <p:cNvPr id="3" name="Notes Placeholder 2"/>
@@ -1174,7 +1174,7 @@
             </p:txBody>
           </p:sp>
         </mc:Choice>
-        <mc:Fallback>
+        <mc:Fallback xmlns="">
           <p:sp>
             <p:nvSpPr>
               <p:cNvPr id="3" name="Notes Placeholder 2"/>
@@ -21681,8 +21681,8 @@
           </a:p>
         </p:txBody>
       </p:sp>
-      <mc:AlternateContent xmlns:mc="http://schemas.openxmlformats.org/markup-compatibility/2006">
-        <mc:Choice xmlns:a14="http://schemas.microsoft.com/office/drawing/2010/main" Requires="a14">
+      <mc:AlternateContent xmlns:mc="http://schemas.openxmlformats.org/markup-compatibility/2006" xmlns:a14="http://schemas.microsoft.com/office/drawing/2010/main">
+        <mc:Choice Requires="a14">
           <p:sp>
             <p:nvSpPr>
               <p:cNvPr id="11" name="Text Placeholder 10">
@@ -22181,7 +22181,7 @@
             </p:txBody>
           </p:sp>
         </mc:Choice>
-        <mc:Fallback>
+        <mc:Fallback xmlns="">
           <p:sp>
             <p:nvSpPr>
               <p:cNvPr id="11" name="Text Placeholder 10">
@@ -23395,8 +23395,8 @@
           </a:p>
         </p:txBody>
       </p:sp>
-      <mc:AlternateContent xmlns:mc="http://schemas.openxmlformats.org/markup-compatibility/2006">
-        <mc:Choice xmlns:a14="http://schemas.microsoft.com/office/drawing/2010/main" Requires="a14">
+      <mc:AlternateContent xmlns:mc="http://schemas.openxmlformats.org/markup-compatibility/2006" xmlns:a14="http://schemas.microsoft.com/office/drawing/2010/main">
+        <mc:Choice Requires="a14">
           <p:sp>
             <p:nvSpPr>
               <p:cNvPr id="11" name="Text Placeholder 10">
@@ -23634,7 +23634,7 @@
                         </a:solidFill>
                         <a:latin typeface="Cambria Math" panose="02040503050406030204" pitchFamily="18" charset="0"/>
                       </a:rPr>
-                      <m:t>-</m:t>
+                      <m:t>−</m:t>
                     </m:r>
                     <m:r>
                       <m:rPr>
@@ -24003,7 +24003,7 @@
             </p:txBody>
           </p:sp>
         </mc:Choice>
-        <mc:Fallback>
+        <mc:Fallback xmlns="">
           <p:sp>
             <p:nvSpPr>
               <p:cNvPr id="11" name="Text Placeholder 10">
@@ -25290,8 +25290,8 @@
           </a:p>
         </p:txBody>
       </p:sp>
-      <mc:AlternateContent xmlns:mc="http://schemas.openxmlformats.org/markup-compatibility/2006">
-        <mc:Choice xmlns:a14="http://schemas.microsoft.com/office/drawing/2010/main" Requires="a14">
+      <mc:AlternateContent xmlns:mc="http://schemas.openxmlformats.org/markup-compatibility/2006" xmlns:a14="http://schemas.microsoft.com/office/drawing/2010/main">
+        <mc:Choice Requires="a14">
           <p:sp>
             <p:nvSpPr>
               <p:cNvPr id="11" name="Text Placeholder 10">
@@ -25861,7 +25861,9 @@
                       <m:t>spent</m:t>
                     </m:r>
                     <m:r>
-                      <a:rPr lang="en-CH" i="1"/>
+                      <a:rPr lang="en-CH" i="1">
+                        <a:latin typeface="Cambria Math" panose="02040503050406030204" pitchFamily="18" charset="0"/>
+                      </a:rPr>
                       <m:t>=</m:t>
                     </m:r>
                   </m:oMath>
@@ -25869,6 +25871,7 @@
                 <a:endParaRPr lang="en-US" i="1" dirty="0"/>
               </a:p>
               <a:p>
+                <a:pPr/>
                 <a14:m>
                   <m:oMathPara xmlns:m="http://schemas.openxmlformats.org/officeDocument/2006/math">
                     <m:oMathParaPr>
@@ -25878,7 +25881,9 @@
                       <m:f>
                         <m:fPr>
                           <m:ctrlPr>
-                            <a:rPr lang="en-CH" i="1"/>
+                            <a:rPr lang="en-CH" i="1">
+                              <a:latin typeface="Cambria Math" panose="02040503050406030204" pitchFamily="18" charset="0"/>
+                            </a:rPr>
                           </m:ctrlPr>
                         </m:fPr>
                         <m:num>
@@ -25997,6 +26002,7 @@
                               <a:solidFill>
                                 <a:srgbClr val="FF0000"/>
                               </a:solidFill>
+                              <a:latin typeface="Cambria Math" panose="02040503050406030204" pitchFamily="18" charset="0"/>
                             </a:rPr>
                             <m:t>(</m:t>
                           </m:r>
@@ -26014,17 +26020,22 @@
                               <a:solidFill>
                                 <a:srgbClr val="FF0000"/>
                               </a:solidFill>
+                              <a:latin typeface="Cambria Math" panose="02040503050406030204" pitchFamily="18" charset="0"/>
                             </a:rPr>
                             <m:t>)</m:t>
                           </m:r>
                         </m:num>
                         <m:den>
                           <m:r>
-                            <a:rPr lang="en-CH" i="1"/>
+                            <a:rPr lang="en-CH" i="1">
+                              <a:latin typeface="Cambria Math" panose="02040503050406030204" pitchFamily="18" charset="0"/>
+                            </a:rPr>
                             <m:t>𝑇𝐶</m:t>
                           </m:r>
                           <m:r>
-                            <a:rPr lang="en-CH" i="1"/>
+                            <a:rPr lang="en-CH" i="1">
+                              <a:latin typeface="Cambria Math" panose="02040503050406030204" pitchFamily="18" charset="0"/>
+                            </a:rPr>
                             <m:t>(</m:t>
                           </m:r>
                           <m:r>
@@ -26034,7 +26045,9 @@
                             <m:t>𝑐</m:t>
                           </m:r>
                           <m:r>
-                            <a:rPr lang="en-CH" i="1"/>
+                            <a:rPr lang="en-CH" i="1">
+                              <a:latin typeface="Cambria Math" panose="02040503050406030204" pitchFamily="18" charset="0"/>
+                            </a:rPr>
                             <m:t>)</m:t>
                           </m:r>
                         </m:den>
@@ -26047,7 +26060,7 @@
             </p:txBody>
           </p:sp>
         </mc:Choice>
-        <mc:Fallback>
+        <mc:Fallback xmlns="">
           <p:sp>
             <p:nvSpPr>
               <p:cNvPr id="11" name="Text Placeholder 10">
@@ -33247,15 +33260,6 @@
 </file>
 
 <file path=customXml/item1.xml><?xml version="1.0" encoding="utf-8"?>
-<?mso-contentType ?>
-<FormTemplates xmlns="http://schemas.microsoft.com/sharepoint/v3/contenttype/forms">
-  <Display>DocumentLibraryForm</Display>
-  <Edit>DocumentLibraryForm</Edit>
-  <New>DocumentLibraryForm</New>
-</FormTemplates>
-</file>
-
-<file path=customXml/item2.xml><?xml version="1.0" encoding="utf-8"?>
 <p:properties xmlns:p="http://schemas.microsoft.com/office/2006/metadata/properties" xmlns:xsi="http://www.w3.org/2001/XMLSchema-instance" xmlns:pc="http://schemas.microsoft.com/office/infopath/2007/PartnerControls">
   <documentManagement>
     <TaxCatchAll xmlns="50ba1161-8fcf-4648-a98a-8cbde4cee383" xsi:nil="true"/>
@@ -33264,6 +33268,15 @@
     </lcf76f155ced4ddcb4097134ff3c332f>
   </documentManagement>
 </p:properties>
+</file>
+
+<file path=customXml/item2.xml><?xml version="1.0" encoding="utf-8"?>
+<?mso-contentType ?>
+<FormTemplates xmlns="http://schemas.microsoft.com/sharepoint/v3/contenttype/forms">
+  <Display>DocumentLibraryForm</Display>
+  <Edit>DocumentLibraryForm</Edit>
+  <New>DocumentLibraryForm</New>
+</FormTemplates>
 </file>
 
 <file path=customXml/item3.xml><?xml version="1.0" encoding="utf-8"?>
@@ -33468,14 +33481,6 @@
 </file>
 
 <file path=customXml/itemProps1.xml><?xml version="1.0" encoding="utf-8"?>
-<ds:datastoreItem xmlns:ds="http://schemas.openxmlformats.org/officeDocument/2006/customXml" ds:itemID="{D55AE8BB-A4BB-4E89-B55D-B4E560473032}">
-  <ds:schemaRefs>
-    <ds:schemaRef ds:uri="http://schemas.microsoft.com/sharepoint/v3/contenttype/forms"/>
-  </ds:schemaRefs>
-</ds:datastoreItem>
-</file>
-
-<file path=customXml/itemProps2.xml><?xml version="1.0" encoding="utf-8"?>
 <ds:datastoreItem xmlns:ds="http://schemas.openxmlformats.org/officeDocument/2006/customXml" ds:itemID="{5710BB5C-7355-4D41-B1BB-CFD6F211FEDD}">
   <ds:schemaRefs>
     <ds:schemaRef ds:uri="http://schemas.microsoft.com/office/2006/documentManagement/types"/>
@@ -33488,6 +33493,14 @@
     <ds:schemaRef ds:uri="http://www.w3.org/XML/1998/namespace"/>
     <ds:schemaRef ds:uri="http://purl.org/dc/terms/"/>
     <ds:schemaRef ds:uri="http://purl.org/dc/elements/1.1/"/>
+  </ds:schemaRefs>
+</ds:datastoreItem>
+</file>
+
+<file path=customXml/itemProps2.xml><?xml version="1.0" encoding="utf-8"?>
+<ds:datastoreItem xmlns:ds="http://schemas.openxmlformats.org/officeDocument/2006/customXml" ds:itemID="{D55AE8BB-A4BB-4E89-B55D-B4E560473032}">
+  <ds:schemaRefs>
+    <ds:schemaRef ds:uri="http://schemas.microsoft.com/sharepoint/v3/contenttype/forms"/>
   </ds:schemaRefs>
 </ds:datastoreItem>
 </file>

--- a/ZenabuPhD/COMMUNITY PROTECTION/PRESENTATIONS/CP_Presentation3_CHAI.pptx
+++ b/ZenabuPhD/COMMUNITY PROTECTION/PRESENTATIONS/CP_Presentation3_CHAI.pptx
@@ -255,7 +255,7 @@
           <a:p>
             <a:fld id="{E7F142B0-B91C-4CEB-A596-BAFBF7C16CA8}" type="datetimeFigureOut">
               <a:rPr lang="de-CH" smtClean="0"/>
-              <a:t>20.05.2026</a:t>
+              <a:t>26.05.2026</a:t>
             </a:fld>
             <a:endParaRPr lang="de-CH"/>
           </a:p>
@@ -432,7 +432,7 @@
           <a:p>
             <a:fld id="{1AD84D78-5243-4D95-A46D-1A2BEC34DE8C}" type="datetimeFigureOut">
               <a:rPr lang="de-CH" smtClean="0"/>
-              <a:t>20.05.2026</a:t>
+              <a:t>26.05.2026</a:t>
             </a:fld>
             <a:endParaRPr lang="de-CH"/>
           </a:p>
@@ -22789,14 +22789,14 @@
           <p:nvPr>
             <p:extLst>
               <p:ext uri="{D42A27DB-BD31-4B8C-83A1-F6EECF244321}">
-                <p14:modId xmlns:p14="http://schemas.microsoft.com/office/powerpoint/2010/main" val="615738520"/>
+                <p14:modId xmlns:p14="http://schemas.microsoft.com/office/powerpoint/2010/main" val="3793988112"/>
               </p:ext>
             </p:extLst>
           </p:nvPr>
         </p:nvGraphicFramePr>
         <p:xfrm>
-          <a:off x="473445" y="913482"/>
-          <a:ext cx="8215545" cy="3001579"/>
+          <a:off x="467513" y="913482"/>
+          <a:ext cx="8221477" cy="3001579"/>
         </p:xfrm>
         <a:graphic>
           <a:graphicData uri="http://schemas.openxmlformats.org/drawingml/2006/table">
@@ -22805,7 +22805,7 @@
                 <a:tableStyleId>{5C22544A-7EE6-4342-B048-85BDC9FD1C3A}</a:tableStyleId>
               </a:tblPr>
               <a:tblGrid>
-                <a:gridCol w="8215545">
+                <a:gridCol w="8221477">
                   <a:extLst>
                     <a:ext uri="{9D8B030D-6E8A-4147-A177-3AD203B41FA5}">
                       <a16:colId xmlns:a16="http://schemas.microsoft.com/office/drawing/2014/main" val="2505335421"/>
@@ -33260,26 +33260,6 @@
 </file>
 
 <file path=customXml/item1.xml><?xml version="1.0" encoding="utf-8"?>
-<p:properties xmlns:p="http://schemas.microsoft.com/office/2006/metadata/properties" xmlns:xsi="http://www.w3.org/2001/XMLSchema-instance" xmlns:pc="http://schemas.microsoft.com/office/infopath/2007/PartnerControls">
-  <documentManagement>
-    <TaxCatchAll xmlns="50ba1161-8fcf-4648-a98a-8cbde4cee383" xsi:nil="true"/>
-    <lcf76f155ced4ddcb4097134ff3c332f xmlns="ee9d2b9f-9545-45fa-9117-0d8c20be045f">
-      <Terms xmlns="http://schemas.microsoft.com/office/infopath/2007/PartnerControls"/>
-    </lcf76f155ced4ddcb4097134ff3c332f>
-  </documentManagement>
-</p:properties>
-</file>
-
-<file path=customXml/item2.xml><?xml version="1.0" encoding="utf-8"?>
-<?mso-contentType ?>
-<FormTemplates xmlns="http://schemas.microsoft.com/sharepoint/v3/contenttype/forms">
-  <Display>DocumentLibraryForm</Display>
-  <Edit>DocumentLibraryForm</Edit>
-  <New>DocumentLibraryForm</New>
-</FormTemplates>
-</file>
-
-<file path=customXml/item3.xml><?xml version="1.0" encoding="utf-8"?>
 <ct:contentTypeSchema xmlns:ct="http://schemas.microsoft.com/office/2006/metadata/contentType" xmlns:ma="http://schemas.microsoft.com/office/2006/metadata/properties/metaAttributes" ct:_="" ma:_="" ma:contentTypeName="Document" ma:contentTypeID="0x0101007183271A4D6A8A4F824758BD8F4739A3" ma:contentTypeVersion="13" ma:contentTypeDescription="Create a new document." ma:contentTypeScope="" ma:versionID="a1c0693b607dd6f91e6177489631d03c">
   <xsd:schema xmlns:xsd="http://www.w3.org/2001/XMLSchema" xmlns:xs="http://www.w3.org/2001/XMLSchema" xmlns:p="http://schemas.microsoft.com/office/2006/metadata/properties" xmlns:ns2="ee9d2b9f-9545-45fa-9117-0d8c20be045f" xmlns:ns3="50ba1161-8fcf-4648-a98a-8cbde4cee383" targetNamespace="http://schemas.microsoft.com/office/2006/metadata/properties" ma:root="true" ma:fieldsID="2589725228f1db46fc508b989fd01238" ns2:_="" ns3:_="">
     <xsd:import namespace="ee9d2b9f-9545-45fa-9117-0d8c20be045f"/>
@@ -33480,32 +33460,27 @@
 </ct:contentTypeSchema>
 </file>
 
-<file path=customXml/itemProps1.xml><?xml version="1.0" encoding="utf-8"?>
-<ds:datastoreItem xmlns:ds="http://schemas.openxmlformats.org/officeDocument/2006/customXml" ds:itemID="{5710BB5C-7355-4D41-B1BB-CFD6F211FEDD}">
-  <ds:schemaRefs>
-    <ds:schemaRef ds:uri="http://schemas.microsoft.com/office/2006/documentManagement/types"/>
-    <ds:schemaRef ds:uri="http://schemas.microsoft.com/office/infopath/2007/PartnerControls"/>
-    <ds:schemaRef ds:uri="ee9d2b9f-9545-45fa-9117-0d8c20be045f"/>
-    <ds:schemaRef ds:uri="50ba1161-8fcf-4648-a98a-8cbde4cee383"/>
-    <ds:schemaRef ds:uri="http://schemas.openxmlformats.org/package/2006/metadata/core-properties"/>
-    <ds:schemaRef ds:uri="http://schemas.microsoft.com/office/2006/metadata/properties"/>
-    <ds:schemaRef ds:uri="http://purl.org/dc/dcmitype/"/>
-    <ds:schemaRef ds:uri="http://www.w3.org/XML/1998/namespace"/>
-    <ds:schemaRef ds:uri="http://purl.org/dc/terms/"/>
-    <ds:schemaRef ds:uri="http://purl.org/dc/elements/1.1/"/>
-  </ds:schemaRefs>
-</ds:datastoreItem>
+<file path=customXml/item2.xml><?xml version="1.0" encoding="utf-8"?>
+<?mso-contentType ?>
+<FormTemplates xmlns="http://schemas.microsoft.com/sharepoint/v3/contenttype/forms">
+  <Display>DocumentLibraryForm</Display>
+  <Edit>DocumentLibraryForm</Edit>
+  <New>DocumentLibraryForm</New>
+</FormTemplates>
 </file>
 
-<file path=customXml/itemProps2.xml><?xml version="1.0" encoding="utf-8"?>
-<ds:datastoreItem xmlns:ds="http://schemas.openxmlformats.org/officeDocument/2006/customXml" ds:itemID="{D55AE8BB-A4BB-4E89-B55D-B4E560473032}">
-  <ds:schemaRefs>
-    <ds:schemaRef ds:uri="http://schemas.microsoft.com/sharepoint/v3/contenttype/forms"/>
-  </ds:schemaRefs>
-</ds:datastoreItem>
+<file path=customXml/item3.xml><?xml version="1.0" encoding="utf-8"?>
+<p:properties xmlns:p="http://schemas.microsoft.com/office/2006/metadata/properties" xmlns:xsi="http://www.w3.org/2001/XMLSchema-instance" xmlns:pc="http://schemas.microsoft.com/office/infopath/2007/PartnerControls">
+  <documentManagement>
+    <TaxCatchAll xmlns="50ba1161-8fcf-4648-a98a-8cbde4cee383" xsi:nil="true"/>
+    <lcf76f155ced4ddcb4097134ff3c332f xmlns="ee9d2b9f-9545-45fa-9117-0d8c20be045f">
+      <Terms xmlns="http://schemas.microsoft.com/office/infopath/2007/PartnerControls"/>
+    </lcf76f155ced4ddcb4097134ff3c332f>
+  </documentManagement>
+</p:properties>
 </file>
 
-<file path=customXml/itemProps3.xml><?xml version="1.0" encoding="utf-8"?>
+<file path=customXml/itemProps1.xml><?xml version="1.0" encoding="utf-8"?>
 <ds:datastoreItem xmlns:ds="http://schemas.openxmlformats.org/officeDocument/2006/customXml" ds:itemID="{AF540628-D5CF-4AAC-907E-1AA048089356}">
   <ds:schemaRefs>
     <ds:schemaRef ds:uri="http://schemas.microsoft.com/office/2006/metadata/contentType"/>
@@ -33524,6 +33499,31 @@
 </ds:datastoreItem>
 </file>
 
+<file path=customXml/itemProps2.xml><?xml version="1.0" encoding="utf-8"?>
+<ds:datastoreItem xmlns:ds="http://schemas.openxmlformats.org/officeDocument/2006/customXml" ds:itemID="{D55AE8BB-A4BB-4E89-B55D-B4E560473032}">
+  <ds:schemaRefs>
+    <ds:schemaRef ds:uri="http://schemas.microsoft.com/sharepoint/v3/contenttype/forms"/>
+  </ds:schemaRefs>
+</ds:datastoreItem>
+</file>
+
+<file path=customXml/itemProps3.xml><?xml version="1.0" encoding="utf-8"?>
+<ds:datastoreItem xmlns:ds="http://schemas.openxmlformats.org/officeDocument/2006/customXml" ds:itemID="{5710BB5C-7355-4D41-B1BB-CFD6F211FEDD}">
+  <ds:schemaRefs>
+    <ds:schemaRef ds:uri="http://schemas.microsoft.com/office/2006/documentManagement/types"/>
+    <ds:schemaRef ds:uri="http://schemas.microsoft.com/office/infopath/2007/PartnerControls"/>
+    <ds:schemaRef ds:uri="ee9d2b9f-9545-45fa-9117-0d8c20be045f"/>
+    <ds:schemaRef ds:uri="50ba1161-8fcf-4648-a98a-8cbde4cee383"/>
+    <ds:schemaRef ds:uri="http://schemas.openxmlformats.org/package/2006/metadata/core-properties"/>
+    <ds:schemaRef ds:uri="http://schemas.microsoft.com/office/2006/metadata/properties"/>
+    <ds:schemaRef ds:uri="http://purl.org/dc/dcmitype/"/>
+    <ds:schemaRef ds:uri="http://www.w3.org/XML/1998/namespace"/>
+    <ds:schemaRef ds:uri="http://purl.org/dc/terms/"/>
+    <ds:schemaRef ds:uri="http://purl.org/dc/elements/1.1/"/>
+  </ds:schemaRefs>
+</ds:datastoreItem>
+</file>
+
 <file path=docMetadata/LabelInfo.xml><?xml version="1.0" encoding="utf-8"?>
 <clbl:labelList xmlns:clbl="http://schemas.microsoft.com/office/2020/mipLabelMetadata">
   <clbl:label id="{a42cdcd0-f576-4592-acdb-6fc911aee612}" enabled="1" method="Privileged" siteId="{9bb8b9bd-971a-4fd3-90c3-c394e2feb8b2}" contentBits="0" removed="0"/>
